--- a/S1-CL3-Cloud-Infrastructure-Improvement/delivery/topic_02/Topic_02_Slides.pptx
+++ b/S1-CL3-Cloud-Infrastructure-Improvement/delivery/topic_02/Topic_02_Slides.pptx
@@ -599,7 +599,7 @@
           </a:p>
           <a:p>
             <a:r>
-              <a:t>Check both halves are present: the contrast, and the provisioning explanation.</a:t>
+              <a:t>Check both halves are present: the provisioning explanation, and the public-versus-private contrast with its configuration consequences.</a:t>
             </a:r>
           </a:p>
         </p:txBody>
@@ -964,7 +964,12 @@
           <a:lstStyle/>
           <a:p>
             <a:r>
-              <a:t>The how-to per tier. The database consistency constraint matters — it's an accounting system; you scale reads, you don't shard the ledger.</a:t>
+              <a:t>The how-to per tier. On the website the storage move is the obvious one — site media on local EBS cannot survive a second instance, so it has to move before compute can scale at all.</a:t>
+            </a:r>
+          </a:p>
+          <a:p>
+            <a:r>
+              <a:t>Order matters: some tiers block others. Ask which tier has to move first and why.</a:t>
             </a:r>
           </a:p>
         </p:txBody>
@@ -1179,12 +1184,17 @@
           <a:lstStyle/>
           <a:p>
             <a:r>
-              <a:t>Contextual knowledge for the assessment's Q2 — the contrast is the answer: static content suits object storage; a transactional ledger does not.</a:t>
-            </a:r>
-          </a:p>
-          <a:p>
-            <a:r>
-              <a:t>Be ready to explain provisioning object storage for a static-site workload — that's the examinable half.</a:t>
+              <a:t>Contextual knowledge for the assessment's Q2. The examinable distinction is USE versus DEPEND — a system can store objects without serving them.</a:t>
+            </a:r>
+          </a:p>
+          <a:p>
+            <a:r>
+              <a:t>The website is the public case: its media has to leave the instance before compute can scale, and it is served to the world.</a:t>
+            </a:r>
+          </a:p>
+          <a:p>
+            <a:r>
+              <a:t>Warn them explicitly: proposing public access or a CDN for a private document store holding personal information is a serious error, not a style choice.</a:t>
             </a:r>
           </a:p>
         </p:txBody>
@@ -4566,7 +4576,7 @@
                 </a:solidFill>
                 <a:latin typeface="Roboto"/>
               </a:rPr>
-              <a:t>Database: select a managed service that scales reads without a rebuild, keeping the accounting data consistent.</a:t>
+              <a:t>Database: select a managed service that scales reads without a rebuild, keeping writes consistent.</a:t>
             </a:r>
           </a:p>
           <a:p>
@@ -4597,7 +4607,7 @@
                 </a:solidFill>
                 <a:latin typeface="Roboto"/>
               </a:rPr>
-              <a:t>Storage: select storage that grows on demand rather than a fixed-size volume.</a:t>
+              <a:t>Storage: get the content off the instance and onto storage that grows on demand.</a:t>
             </a:r>
           </a:p>
         </p:txBody>
@@ -6569,7 +6579,7 @@
               </a:spcAft>
             </a:pPr>
             <a:r>
-              <a:rPr sz="2400" b="1" i="0">
+              <a:rPr sz="2200" b="1" i="0">
                 <a:solidFill>
                   <a:srgbClr val="EDAB0C"/>
                 </a:solidFill>
@@ -6578,13 +6588,13 @@
               <a:t>■  </a:t>
             </a:r>
             <a:r>
-              <a:rPr sz="2400" b="0" i="0">
+              <a:rPr sz="2200" b="0" i="0">
                 <a:solidFill>
                   <a:srgbClr val="2A2929"/>
                 </a:solidFill>
                 <a:latin typeface="Roboto"/>
               </a:rPr>
-              <a:t>Object storage holds whole objects addressed by key — it scales on demand and serves static content directly, no server involved.</a:t>
+              <a:t>Object storage holds whole objects addressed by key — it scales on demand, and every instance sees the same content.</a:t>
             </a:r>
           </a:p>
           <a:p>
@@ -6600,7 +6610,7 @@
               </a:spcAft>
             </a:pPr>
             <a:r>
-              <a:rPr sz="2400" b="1" i="0">
+              <a:rPr sz="2200" b="1" i="0">
                 <a:solidFill>
                   <a:srgbClr val="EDAB0C"/>
                 </a:solidFill>
@@ -6609,13 +6619,13 @@
               <a:t>■  </a:t>
             </a:r>
             <a:r>
-              <a:rPr sz="2400" b="0" i="0">
+              <a:rPr sz="2200" b="0" i="0">
                 <a:solidFill>
                   <a:srgbClr val="2A2929"/>
                 </a:solidFill>
                 <a:latin typeface="Roboto"/>
               </a:rPr>
-              <a:t>The natural home for a static website's content: pages, images, downloads.</a:t>
+              <a:t>Serving content publicly is one use: pages, images, downloads, read straight from the store or through a content delivery network.</a:t>
             </a:r>
           </a:p>
           <a:p>
@@ -6631,7 +6641,7 @@
               </a:spcAft>
             </a:pPr>
             <a:r>
-              <a:rPr sz="2400" b="1" i="0">
+              <a:rPr sz="2200" b="1" i="0">
                 <a:solidFill>
                   <a:srgbClr val="EDAB0C"/>
                 </a:solidFill>
@@ -6640,13 +6650,44 @@
               <a:t>■  </a:t>
             </a:r>
             <a:r>
-              <a:rPr sz="2400" b="0" i="0">
+              <a:rPr sz="2200" b="0" i="0">
                 <a:solidFill>
                   <a:srgbClr val="2A2929"/>
                 </a:solidFill>
                 <a:latin typeface="Roboto"/>
               </a:rPr>
-              <a:t>A stateful, transactional, database-backed system is the opposite workload — object storage is not its primary store.</a:t>
+              <a:t>Holding files privately is a different use: documents a system attaches to its records, reached only by the application, never exposed publicly.</a:t>
+            </a:r>
+          </a:p>
+          <a:p>
+            <a:pPr marL="0" indent="0">
+              <a:lnSpc>
+                <a:spcPct val="105000"/>
+              </a:lnSpc>
+              <a:spcBef>
+                <a:spcPts val="0"/>
+              </a:spcBef>
+              <a:spcAft>
+                <a:spcPts val="1000"/>
+              </a:spcAft>
+            </a:pPr>
+            <a:r>
+              <a:rPr sz="2200" b="1" i="0">
+                <a:solidFill>
+                  <a:srgbClr val="EDAB0C"/>
+                </a:solidFill>
+                <a:latin typeface="Roboto"/>
+              </a:rPr>
+              <a:t>■  </a:t>
+            </a:r>
+            <a:r>
+              <a:rPr sz="2200" b="0" i="0">
+                <a:solidFill>
+                  <a:srgbClr val="2A2929"/>
+                </a:solidFill>
+                <a:latin typeface="Roboto"/>
+              </a:rPr>
+              <a:t>Same service, opposite configuration — public read and caching for one; blocked public access, a private path, access logging and lifecycle tiering for the other.</a:t>
             </a:r>
           </a:p>
         </p:txBody>
@@ -7010,7 +7051,7 @@
                 </a:solidFill>
                 <a:latin typeface="Roboto"/>
               </a:rPr>
-              <a:t>Contrast a stateful accounting workload's storage needs with an object-storage-dependent website workload, and explain how you would provision the latter.</a:t>
+              <a:t>Explain how object storage is provisioned and content served from it, then contrast serving objects publicly with holding them privately behind an application — and what each means for how the storage is configured.</a:t>
             </a:r>
           </a:p>
         </p:txBody>
@@ -7719,7 +7760,7 @@
                 </a:solidFill>
                 <a:latin typeface="Roboto"/>
               </a:rPr>
-              <a:t>Object storage suits static content; a transactional system is the contrast to know.</a:t>
+              <a:t>Object storage: serving publicly and holding privately are the same service configured oppositely.</a:t>
             </a:r>
           </a:p>
         </p:txBody>
